--- a/src/backend/bisheng/linsight/builtin_skills/bisheng-pptx/templates/tech-dark/template.pptx
+++ b/src/backend/bisheng/linsight/builtin_skills/bisheng-pptx/templates/tech-dark/template.pptx
@@ -2066,8 +2066,8 @@
         </p:nvSpPr>
         <p:spPr>
           <a:xfrm>
-            <a:off x="7620000" y="-1524000"/>
-            <a:ext cx="6604000" cy="6604000"/>
+            <a:off x="6604000" y="304800"/>
+            <a:ext cx="5334000" cy="5334000"/>
           </a:xfrm>
           <a:prstGeom prst="ellipse">
             <a:avLst/>
@@ -2110,8 +2110,8 @@
         </p:nvSpPr>
         <p:spPr>
           <a:xfrm>
-            <a:off x="9652000" y="2921000"/>
-            <a:ext cx="4318000" cy="4318000"/>
+            <a:off x="8890000" y="2997200"/>
+            <a:ext cx="3048000" cy="3048000"/>
           </a:xfrm>
           <a:prstGeom prst="ellipse">
             <a:avLst/>
@@ -2174,7 +2174,7 @@
               </a:lnSpc>
             </a:pPr>
             <a:r>
-              <a:rPr sz="1400" b="1">
+              <a:rPr sz="1300" b="1">
                 <a:solidFill>
                   <a:srgbClr val="35D0BA"/>
                 </a:solidFill>
@@ -2214,7 +2214,7 @@
               </a:lnSpc>
             </a:pPr>
             <a:r>
-              <a:rPr sz="4000" b="1">
+              <a:rPr sz="4400" b="1">
                 <a:solidFill>
                   <a:srgbClr val="EAF0F8"/>
                 </a:solidFill>
@@ -2502,8 +2502,8 @@
         </p:nvSpPr>
         <p:spPr>
           <a:xfrm>
-            <a:off x="609600" y="6477000"/>
-            <a:ext cx="7112000" cy="177800"/>
+            <a:off x="609600" y="6273800"/>
+            <a:ext cx="7112000" cy="203200"/>
           </a:xfrm>
           <a:prstGeom prst="rect">
             <a:avLst/>
@@ -2522,7 +2522,7 @@
               </a:lnSpc>
             </a:pPr>
             <a:r>
-              <a:rPr sz="900" b="0">
+              <a:rPr sz="1000" b="0">
                 <a:solidFill>
                   <a:srgbClr val="93A5C0"/>
                 </a:solidFill>
@@ -2542,7 +2542,7 @@
         </p:nvSpPr>
         <p:spPr>
           <a:xfrm>
-            <a:off x="10820400" y="6451600"/>
+            <a:off x="10820400" y="6248400"/>
             <a:ext cx="762000" cy="203200"/>
           </a:xfrm>
           <a:prstGeom prst="rect">
@@ -2551,13 +2551,15 @@
           <a:noFill/>
         </p:spPr>
         <p:txBody>
-          <a:bodyPr wrap="none" lIns="0" rIns="0" tIns="0" bIns="0">
-            <a:spAutoFit/>
-          </a:bodyPr>
-          <a:lstStyle/>
-          <a:p>
-            <a:pPr algn="r"/>
-            <a:fld id="{157182D3-10FF-4930-A8D8-2BAA0AE52EAB}" type="slidenum">
+          <a:bodyPr wrap="square" lIns="0" rIns="0" tIns="0" bIns="0">
+            <a:noAutofit/>
+          </a:bodyPr>
+          <a:lstStyle/>
+          <a:p>
+            <a:pPr algn="r">
+              <a:defRPr sz="1000"/>
+            </a:pPr>
+            <a:fld id="{F5185039-E2C3-57DA-A2D3-F9F40F855598}" type="slidenum">
               <a:rPr lang="zh-CN" sz="1000">
                 <a:solidFill>
                   <a:srgbClr val="93A5C0"/>
@@ -3253,8 +3255,8 @@
         </p:nvSpPr>
         <p:spPr>
           <a:xfrm>
-            <a:off x="609600" y="6477000"/>
-            <a:ext cx="7112000" cy="177800"/>
+            <a:off x="609600" y="6273800"/>
+            <a:ext cx="7112000" cy="203200"/>
           </a:xfrm>
           <a:prstGeom prst="rect">
             <a:avLst/>
@@ -3273,7 +3275,7 @@
               </a:lnSpc>
             </a:pPr>
             <a:r>
-              <a:rPr sz="900" b="0">
+              <a:rPr sz="1000" b="0">
                 <a:solidFill>
                   <a:srgbClr val="93A5C0"/>
                 </a:solidFill>
@@ -3293,7 +3295,7 @@
         </p:nvSpPr>
         <p:spPr>
           <a:xfrm>
-            <a:off x="10820400" y="6451600"/>
+            <a:off x="10820400" y="6248400"/>
             <a:ext cx="762000" cy="203200"/>
           </a:xfrm>
           <a:prstGeom prst="rect">
@@ -3302,13 +3304,15 @@
           <a:noFill/>
         </p:spPr>
         <p:txBody>
-          <a:bodyPr wrap="none" lIns="0" rIns="0" tIns="0" bIns="0">
-            <a:spAutoFit/>
-          </a:bodyPr>
-          <a:lstStyle/>
-          <a:p>
-            <a:pPr algn="r"/>
-            <a:fld id="{94A8F043-12DE-426C-B440-A151FC90D0B0}" type="slidenum">
+          <a:bodyPr wrap="square" lIns="0" rIns="0" tIns="0" bIns="0">
+            <a:noAutofit/>
+          </a:bodyPr>
+          <a:lstStyle/>
+          <a:p>
+            <a:pPr algn="r">
+              <a:defRPr sz="1000"/>
+            </a:pPr>
+            <a:fld id="{61B4ECD5-37ED-56D9-B4A5-590F4C783476}" type="slidenum">
               <a:rPr lang="zh-CN" sz="1000">
                 <a:solidFill>
                   <a:srgbClr val="93A5C0"/>
@@ -4405,8 +4409,8 @@
         </p:nvSpPr>
         <p:spPr>
           <a:xfrm>
-            <a:off x="609600" y="6477000"/>
-            <a:ext cx="7112000" cy="177800"/>
+            <a:off x="609600" y="6273800"/>
+            <a:ext cx="7112000" cy="203200"/>
           </a:xfrm>
           <a:prstGeom prst="rect">
             <a:avLst/>
@@ -4425,7 +4429,7 @@
               </a:lnSpc>
             </a:pPr>
             <a:r>
-              <a:rPr sz="900" b="0">
+              <a:rPr sz="1000" b="0">
                 <a:solidFill>
                   <a:srgbClr val="93A5C0"/>
                 </a:solidFill>
@@ -4445,7 +4449,7 @@
         </p:nvSpPr>
         <p:spPr>
           <a:xfrm>
-            <a:off x="10820400" y="6451600"/>
+            <a:off x="10820400" y="6248400"/>
             <a:ext cx="762000" cy="203200"/>
           </a:xfrm>
           <a:prstGeom prst="rect">
@@ -4454,13 +4458,15 @@
           <a:noFill/>
         </p:spPr>
         <p:txBody>
-          <a:bodyPr wrap="none" lIns="0" rIns="0" tIns="0" bIns="0">
-            <a:spAutoFit/>
-          </a:bodyPr>
-          <a:lstStyle/>
-          <a:p>
-            <a:pPr algn="r"/>
-            <a:fld id="{54E278E1-C5B5-451E-9E2A-70361E419950}" type="slidenum">
+          <a:bodyPr wrap="square" lIns="0" rIns="0" tIns="0" bIns="0">
+            <a:noAutofit/>
+          </a:bodyPr>
+          <a:lstStyle/>
+          <a:p>
+            <a:pPr algn="r">
+              <a:defRPr sz="1000"/>
+            </a:pPr>
+            <a:fld id="{33800E6A-8612-533D-82B7-37426062F8C3}" type="slidenum">
               <a:rPr lang="zh-CN" sz="1000">
                 <a:solidFill>
                   <a:srgbClr val="93A5C0"/>
@@ -5473,8 +5479,8 @@
         </p:nvSpPr>
         <p:spPr>
           <a:xfrm>
-            <a:off x="609600" y="6477000"/>
-            <a:ext cx="7112000" cy="177800"/>
+            <a:off x="609600" y="6273800"/>
+            <a:ext cx="7112000" cy="203200"/>
           </a:xfrm>
           <a:prstGeom prst="rect">
             <a:avLst/>
@@ -5493,7 +5499,7 @@
               </a:lnSpc>
             </a:pPr>
             <a:r>
-              <a:rPr sz="900" b="0">
+              <a:rPr sz="1000" b="0">
                 <a:solidFill>
                   <a:srgbClr val="93A5C0"/>
                 </a:solidFill>
@@ -5513,7 +5519,7 @@
         </p:nvSpPr>
         <p:spPr>
           <a:xfrm>
-            <a:off x="10820400" y="6451600"/>
+            <a:off x="10820400" y="6248400"/>
             <a:ext cx="762000" cy="203200"/>
           </a:xfrm>
           <a:prstGeom prst="rect">
@@ -5522,13 +5528,15 @@
           <a:noFill/>
         </p:spPr>
         <p:txBody>
-          <a:bodyPr wrap="none" lIns="0" rIns="0" tIns="0" bIns="0">
-            <a:spAutoFit/>
-          </a:bodyPr>
-          <a:lstStyle/>
-          <a:p>
-            <a:pPr algn="r"/>
-            <a:fld id="{0F24C20D-656D-441B-A855-A01279147666}" type="slidenum">
+          <a:bodyPr wrap="square" lIns="0" rIns="0" tIns="0" bIns="0">
+            <a:noAutofit/>
+          </a:bodyPr>
+          <a:lstStyle/>
+          <a:p>
+            <a:pPr algn="r">
+              <a:defRPr sz="1000"/>
+            </a:pPr>
+            <a:fld id="{35F0F6C8-64C2-539E-9489-75693ADB0265}" type="slidenum">
               <a:rPr lang="zh-CN" sz="1000">
                 <a:solidFill>
                   <a:srgbClr val="93A5C0"/>
@@ -6458,8 +6466,8 @@
         </p:nvSpPr>
         <p:spPr>
           <a:xfrm>
-            <a:off x="609600" y="6477000"/>
-            <a:ext cx="7112000" cy="177800"/>
+            <a:off x="609600" y="6273800"/>
+            <a:ext cx="7112000" cy="203200"/>
           </a:xfrm>
           <a:prstGeom prst="rect">
             <a:avLst/>
@@ -6478,7 +6486,7 @@
               </a:lnSpc>
             </a:pPr>
             <a:r>
-              <a:rPr sz="900" b="0">
+              <a:rPr sz="1000" b="0">
                 <a:solidFill>
                   <a:srgbClr val="93A5C0"/>
                 </a:solidFill>
@@ -6498,7 +6506,7 @@
         </p:nvSpPr>
         <p:spPr>
           <a:xfrm>
-            <a:off x="10820400" y="6451600"/>
+            <a:off x="10820400" y="6248400"/>
             <a:ext cx="762000" cy="203200"/>
           </a:xfrm>
           <a:prstGeom prst="rect">
@@ -6507,13 +6515,15 @@
           <a:noFill/>
         </p:spPr>
         <p:txBody>
-          <a:bodyPr wrap="none" lIns="0" rIns="0" tIns="0" bIns="0">
-            <a:spAutoFit/>
-          </a:bodyPr>
-          <a:lstStyle/>
-          <a:p>
-            <a:pPr algn="r"/>
-            <a:fld id="{5D65B706-AFB9-4269-912C-8D90F60E1292}" type="slidenum">
+          <a:bodyPr wrap="square" lIns="0" rIns="0" tIns="0" bIns="0">
+            <a:noAutofit/>
+          </a:bodyPr>
+          <a:lstStyle/>
+          <a:p>
+            <a:pPr algn="r">
+              <a:defRPr sz="1000"/>
+            </a:pPr>
+            <a:fld id="{8C8AB690-7E43-5331-A3E4-C99FC2CD452C}" type="slidenum">
               <a:rPr lang="zh-CN" sz="1000">
                 <a:solidFill>
                   <a:srgbClr val="93A5C0"/>
@@ -7049,8 +7059,8 @@
         </p:nvSpPr>
         <p:spPr>
           <a:xfrm>
-            <a:off x="7620000" y="-1524000"/>
-            <a:ext cx="6604000" cy="6604000"/>
+            <a:off x="6604000" y="304800"/>
+            <a:ext cx="5334000" cy="5334000"/>
           </a:xfrm>
           <a:prstGeom prst="ellipse">
             <a:avLst/>
@@ -7093,8 +7103,8 @@
         </p:nvSpPr>
         <p:spPr>
           <a:xfrm>
-            <a:off x="9652000" y="2921000"/>
-            <a:ext cx="4318000" cy="4318000"/>
+            <a:off x="8890000" y="2997200"/>
+            <a:ext cx="3048000" cy="3048000"/>
           </a:xfrm>
           <a:prstGeom prst="ellipse">
             <a:avLst/>
@@ -7938,8 +7948,8 @@
         </p:nvSpPr>
         <p:spPr>
           <a:xfrm>
-            <a:off x="609600" y="6477000"/>
-            <a:ext cx="7112000" cy="177800"/>
+            <a:off x="609600" y="6273800"/>
+            <a:ext cx="7112000" cy="203200"/>
           </a:xfrm>
           <a:prstGeom prst="rect">
             <a:avLst/>
@@ -7958,7 +7968,7 @@
               </a:lnSpc>
             </a:pPr>
             <a:r>
-              <a:rPr sz="900" b="0">
+              <a:rPr sz="1000" b="0">
                 <a:solidFill>
                   <a:srgbClr val="93A5C0"/>
                 </a:solidFill>
@@ -7978,7 +7988,7 @@
         </p:nvSpPr>
         <p:spPr>
           <a:xfrm>
-            <a:off x="10820400" y="6451600"/>
+            <a:off x="10820400" y="6248400"/>
             <a:ext cx="762000" cy="203200"/>
           </a:xfrm>
           <a:prstGeom prst="rect">
@@ -7987,13 +7997,15 @@
           <a:noFill/>
         </p:spPr>
         <p:txBody>
-          <a:bodyPr wrap="none" lIns="0" rIns="0" tIns="0" bIns="0">
-            <a:spAutoFit/>
-          </a:bodyPr>
-          <a:lstStyle/>
-          <a:p>
-            <a:pPr algn="r"/>
-            <a:fld id="{9BE3429F-CF2D-4E6D-9B10-2497F2DA778B}" type="slidenum">
+          <a:bodyPr wrap="square" lIns="0" rIns="0" tIns="0" bIns="0">
+            <a:noAutofit/>
+          </a:bodyPr>
+          <a:lstStyle/>
+          <a:p>
+            <a:pPr algn="r">
+              <a:defRPr sz="1000"/>
+            </a:pPr>
+            <a:fld id="{B883883E-D23E-5CF3-9D8B-D4EB0470F493}" type="slidenum">
               <a:rPr lang="zh-CN" sz="1000">
                 <a:solidFill>
                   <a:srgbClr val="93A5C0"/>
@@ -8039,8 +8051,8 @@
         </p:nvSpPr>
         <p:spPr>
           <a:xfrm>
-            <a:off x="7620000" y="-1524000"/>
-            <a:ext cx="6604000" cy="6604000"/>
+            <a:off x="6604000" y="304800"/>
+            <a:ext cx="5334000" cy="5334000"/>
           </a:xfrm>
           <a:prstGeom prst="ellipse">
             <a:avLst/>
@@ -8083,8 +8095,8 @@
         </p:nvSpPr>
         <p:spPr>
           <a:xfrm>
-            <a:off x="9652000" y="2921000"/>
-            <a:ext cx="4318000" cy="4318000"/>
+            <a:off x="8890000" y="2997200"/>
+            <a:ext cx="3048000" cy="3048000"/>
           </a:xfrm>
           <a:prstGeom prst="ellipse">
             <a:avLst/>
@@ -8247,8 +8259,8 @@
         </p:nvSpPr>
         <p:spPr>
           <a:xfrm>
-            <a:off x="609600" y="6477000"/>
-            <a:ext cx="7112000" cy="177800"/>
+            <a:off x="609600" y="6273800"/>
+            <a:ext cx="7112000" cy="203200"/>
           </a:xfrm>
           <a:prstGeom prst="rect">
             <a:avLst/>
@@ -8267,7 +8279,7 @@
               </a:lnSpc>
             </a:pPr>
             <a:r>
-              <a:rPr sz="900" b="0">
+              <a:rPr sz="1000" b="0">
                 <a:solidFill>
                   <a:srgbClr val="93A5C0"/>
                 </a:solidFill>
@@ -8287,7 +8299,7 @@
         </p:nvSpPr>
         <p:spPr>
           <a:xfrm>
-            <a:off x="10820400" y="6451600"/>
+            <a:off x="10820400" y="6248400"/>
             <a:ext cx="762000" cy="203200"/>
           </a:xfrm>
           <a:prstGeom prst="rect">
@@ -8296,13 +8308,15 @@
           <a:noFill/>
         </p:spPr>
         <p:txBody>
-          <a:bodyPr wrap="none" lIns="0" rIns="0" tIns="0" bIns="0">
-            <a:spAutoFit/>
-          </a:bodyPr>
-          <a:lstStyle/>
-          <a:p>
-            <a:pPr algn="r"/>
-            <a:fld id="{166931A9-DA78-455D-887F-F49D9882147E}" type="slidenum">
+          <a:bodyPr wrap="square" lIns="0" rIns="0" tIns="0" bIns="0">
+            <a:noAutofit/>
+          </a:bodyPr>
+          <a:lstStyle/>
+          <a:p>
+            <a:pPr algn="r">
+              <a:defRPr sz="1000"/>
+            </a:pPr>
+            <a:fld id="{9711FAC7-0B7D-56B3-96AF-14E29581D56C}" type="slidenum">
               <a:rPr lang="zh-CN" sz="1000">
                 <a:solidFill>
                   <a:srgbClr val="93A5C0"/>
@@ -8430,8 +8444,8 @@
         </p:nvSpPr>
         <p:spPr>
           <a:xfrm>
-            <a:off x="609600" y="6477000"/>
-            <a:ext cx="7112000" cy="177800"/>
+            <a:off x="609600" y="6273800"/>
+            <a:ext cx="7112000" cy="203200"/>
           </a:xfrm>
           <a:prstGeom prst="rect">
             <a:avLst/>
@@ -8450,7 +8464,7 @@
               </a:lnSpc>
             </a:pPr>
             <a:r>
-              <a:rPr sz="900" b="0">
+              <a:rPr sz="1000" b="0">
                 <a:solidFill>
                   <a:srgbClr val="93A5C0"/>
                 </a:solidFill>
@@ -8470,7 +8484,7 @@
         </p:nvSpPr>
         <p:spPr>
           <a:xfrm>
-            <a:off x="10820400" y="6451600"/>
+            <a:off x="10820400" y="6248400"/>
             <a:ext cx="762000" cy="203200"/>
           </a:xfrm>
           <a:prstGeom prst="rect">
@@ -8479,13 +8493,15 @@
           <a:noFill/>
         </p:spPr>
         <p:txBody>
-          <a:bodyPr wrap="none" lIns="0" rIns="0" tIns="0" bIns="0">
-            <a:spAutoFit/>
-          </a:bodyPr>
-          <a:lstStyle/>
-          <a:p>
-            <a:pPr algn="r"/>
-            <a:fld id="{932FF137-55BA-4F6D-BA0D-BF5C41975F85}" type="slidenum">
+          <a:bodyPr wrap="square" lIns="0" rIns="0" tIns="0" bIns="0">
+            <a:noAutofit/>
+          </a:bodyPr>
+          <a:lstStyle/>
+          <a:p>
+            <a:pPr algn="r">
+              <a:defRPr sz="1000"/>
+            </a:pPr>
+            <a:fld id="{969F9CD2-C221-5A99-B8D1-C9ECDCC1B8B7}" type="slidenum">
               <a:rPr lang="zh-CN" sz="1000">
                 <a:solidFill>
                   <a:srgbClr val="93A5C0"/>
@@ -8815,8 +8831,8 @@
         </p:nvSpPr>
         <p:spPr>
           <a:xfrm>
-            <a:off x="609600" y="6477000"/>
-            <a:ext cx="7112000" cy="177800"/>
+            <a:off x="609600" y="6273800"/>
+            <a:ext cx="7112000" cy="203200"/>
           </a:xfrm>
           <a:prstGeom prst="rect">
             <a:avLst/>
@@ -8835,7 +8851,7 @@
               </a:lnSpc>
             </a:pPr>
             <a:r>
-              <a:rPr sz="900" b="0">
+              <a:rPr sz="1000" b="0">
                 <a:solidFill>
                   <a:srgbClr val="93A5C0"/>
                 </a:solidFill>
@@ -8855,7 +8871,7 @@
         </p:nvSpPr>
         <p:spPr>
           <a:xfrm>
-            <a:off x="10820400" y="6451600"/>
+            <a:off x="10820400" y="6248400"/>
             <a:ext cx="762000" cy="203200"/>
           </a:xfrm>
           <a:prstGeom prst="rect">
@@ -8864,13 +8880,15 @@
           <a:noFill/>
         </p:spPr>
         <p:txBody>
-          <a:bodyPr wrap="none" lIns="0" rIns="0" tIns="0" bIns="0">
-            <a:spAutoFit/>
-          </a:bodyPr>
-          <a:lstStyle/>
-          <a:p>
-            <a:pPr algn="r"/>
-            <a:fld id="{27F3F4BF-1417-4BC1-8681-3EBBD6A8C34A}" type="slidenum">
+          <a:bodyPr wrap="square" lIns="0" rIns="0" tIns="0" bIns="0">
+            <a:noAutofit/>
+          </a:bodyPr>
+          <a:lstStyle/>
+          <a:p>
+            <a:pPr algn="r">
+              <a:defRPr sz="1000"/>
+            </a:pPr>
+            <a:fld id="{E80E35CC-48D8-5E23-86B8-095D76C3C2D3}" type="slidenum">
               <a:rPr lang="zh-CN" sz="1000">
                 <a:solidFill>
                   <a:srgbClr val="93A5C0"/>
@@ -9257,8 +9275,8 @@
         </p:nvSpPr>
         <p:spPr>
           <a:xfrm>
-            <a:off x="609600" y="6477000"/>
-            <a:ext cx="7112000" cy="177800"/>
+            <a:off x="609600" y="6273800"/>
+            <a:ext cx="7112000" cy="203200"/>
           </a:xfrm>
           <a:prstGeom prst="rect">
             <a:avLst/>
@@ -9277,7 +9295,7 @@
               </a:lnSpc>
             </a:pPr>
             <a:r>
-              <a:rPr sz="900" b="0">
+              <a:rPr sz="1000" b="0">
                 <a:solidFill>
                   <a:srgbClr val="93A5C0"/>
                 </a:solidFill>
@@ -9297,7 +9315,7 @@
         </p:nvSpPr>
         <p:spPr>
           <a:xfrm>
-            <a:off x="10820400" y="6451600"/>
+            <a:off x="10820400" y="6248400"/>
             <a:ext cx="762000" cy="203200"/>
           </a:xfrm>
           <a:prstGeom prst="rect">
@@ -9306,13 +9324,15 @@
           <a:noFill/>
         </p:spPr>
         <p:txBody>
-          <a:bodyPr wrap="none" lIns="0" rIns="0" tIns="0" bIns="0">
-            <a:spAutoFit/>
-          </a:bodyPr>
-          <a:lstStyle/>
-          <a:p>
-            <a:pPr algn="r"/>
-            <a:fld id="{49BAD648-6A54-4AC5-B35E-3B61AF1D2823}" type="slidenum">
+          <a:bodyPr wrap="square" lIns="0" rIns="0" tIns="0" bIns="0">
+            <a:noAutofit/>
+          </a:bodyPr>
+          <a:lstStyle/>
+          <a:p>
+            <a:pPr algn="r">
+              <a:defRPr sz="1000"/>
+            </a:pPr>
+            <a:fld id="{44DDC1F9-8AD7-50A9-8A7E-4B3D3E16FA2C}" type="slidenum">
               <a:rPr lang="zh-CN" sz="1000">
                 <a:solidFill>
                   <a:srgbClr val="93A5C0"/>
@@ -10012,8 +10032,8 @@
         </p:nvSpPr>
         <p:spPr>
           <a:xfrm>
-            <a:off x="609600" y="6477000"/>
-            <a:ext cx="7112000" cy="177800"/>
+            <a:off x="609600" y="6273800"/>
+            <a:ext cx="7112000" cy="203200"/>
           </a:xfrm>
           <a:prstGeom prst="rect">
             <a:avLst/>
@@ -10032,7 +10052,7 @@
               </a:lnSpc>
             </a:pPr>
             <a:r>
-              <a:rPr sz="900" b="0">
+              <a:rPr sz="1000" b="0">
                 <a:solidFill>
                   <a:srgbClr val="93A5C0"/>
                 </a:solidFill>
@@ -10052,7 +10072,7 @@
         </p:nvSpPr>
         <p:spPr>
           <a:xfrm>
-            <a:off x="10820400" y="6451600"/>
+            <a:off x="10820400" y="6248400"/>
             <a:ext cx="762000" cy="203200"/>
           </a:xfrm>
           <a:prstGeom prst="rect">
@@ -10061,13 +10081,15 @@
           <a:noFill/>
         </p:spPr>
         <p:txBody>
-          <a:bodyPr wrap="none" lIns="0" rIns="0" tIns="0" bIns="0">
-            <a:spAutoFit/>
-          </a:bodyPr>
-          <a:lstStyle/>
-          <a:p>
-            <a:pPr algn="r"/>
-            <a:fld id="{9BEF50CF-98CF-4ACC-9F9A-FCEDC6031B30}" type="slidenum">
+          <a:bodyPr wrap="square" lIns="0" rIns="0" tIns="0" bIns="0">
+            <a:noAutofit/>
+          </a:bodyPr>
+          <a:lstStyle/>
+          <a:p>
+            <a:pPr algn="r">
+              <a:defRPr sz="1000"/>
+            </a:pPr>
+            <a:fld id="{E775DFCC-D253-5187-8C66-F0282A98B8CC}" type="slidenum">
               <a:rPr lang="zh-CN" sz="1000">
                 <a:solidFill>
                   <a:srgbClr val="93A5C0"/>
@@ -10891,8 +10913,8 @@
         </p:nvSpPr>
         <p:spPr>
           <a:xfrm>
-            <a:off x="609600" y="6477000"/>
-            <a:ext cx="7112000" cy="177800"/>
+            <a:off x="609600" y="6273800"/>
+            <a:ext cx="7112000" cy="203200"/>
           </a:xfrm>
           <a:prstGeom prst="rect">
             <a:avLst/>
@@ -10911,7 +10933,7 @@
               </a:lnSpc>
             </a:pPr>
             <a:r>
-              <a:rPr sz="900" b="0">
+              <a:rPr sz="1000" b="0">
                 <a:solidFill>
                   <a:srgbClr val="93A5C0"/>
                 </a:solidFill>
@@ -10931,7 +10953,7 @@
         </p:nvSpPr>
         <p:spPr>
           <a:xfrm>
-            <a:off x="10820400" y="6451600"/>
+            <a:off x="10820400" y="6248400"/>
             <a:ext cx="762000" cy="203200"/>
           </a:xfrm>
           <a:prstGeom prst="rect">
@@ -10940,13 +10962,15 @@
           <a:noFill/>
         </p:spPr>
         <p:txBody>
-          <a:bodyPr wrap="none" lIns="0" rIns="0" tIns="0" bIns="0">
-            <a:spAutoFit/>
-          </a:bodyPr>
-          <a:lstStyle/>
-          <a:p>
-            <a:pPr algn="r"/>
-            <a:fld id="{2391CE32-7B74-4984-96AB-BFC96F397804}" type="slidenum">
+          <a:bodyPr wrap="square" lIns="0" rIns="0" tIns="0" bIns="0">
+            <a:noAutofit/>
+          </a:bodyPr>
+          <a:lstStyle/>
+          <a:p>
+            <a:pPr algn="r">
+              <a:defRPr sz="1000"/>
+            </a:pPr>
+            <a:fld id="{93676F21-3DBD-518C-9E84-BB60520BEF19}" type="slidenum">
               <a:rPr lang="zh-CN" sz="1000">
                 <a:solidFill>
                   <a:srgbClr val="93A5C0"/>
@@ -11983,8 +12007,8 @@
         </p:nvSpPr>
         <p:spPr>
           <a:xfrm>
-            <a:off x="609600" y="6477000"/>
-            <a:ext cx="7112000" cy="177800"/>
+            <a:off x="609600" y="6273800"/>
+            <a:ext cx="7112000" cy="203200"/>
           </a:xfrm>
           <a:prstGeom prst="rect">
             <a:avLst/>
@@ -12003,7 +12027,7 @@
               </a:lnSpc>
             </a:pPr>
             <a:r>
-              <a:rPr sz="900" b="0">
+              <a:rPr sz="1000" b="0">
                 <a:solidFill>
                   <a:srgbClr val="93A5C0"/>
                 </a:solidFill>
@@ -12023,7 +12047,7 @@
         </p:nvSpPr>
         <p:spPr>
           <a:xfrm>
-            <a:off x="10820400" y="6451600"/>
+            <a:off x="10820400" y="6248400"/>
             <a:ext cx="762000" cy="203200"/>
           </a:xfrm>
           <a:prstGeom prst="rect">
@@ -12032,13 +12056,15 @@
           <a:noFill/>
         </p:spPr>
         <p:txBody>
-          <a:bodyPr wrap="none" lIns="0" rIns="0" tIns="0" bIns="0">
-            <a:spAutoFit/>
-          </a:bodyPr>
-          <a:lstStyle/>
-          <a:p>
-            <a:pPr algn="r"/>
-            <a:fld id="{AC027FEB-930A-4E90-9A2A-FF42BA747D03}" type="slidenum">
+          <a:bodyPr wrap="square" lIns="0" rIns="0" tIns="0" bIns="0">
+            <a:noAutofit/>
+          </a:bodyPr>
+          <a:lstStyle/>
+          <a:p>
+            <a:pPr algn="r">
+              <a:defRPr sz="1000"/>
+            </a:pPr>
+            <a:fld id="{67141E55-4CF7-5F80-9C6E-9FD832881664}" type="slidenum">
               <a:rPr lang="zh-CN" sz="1000">
                 <a:solidFill>
                   <a:srgbClr val="93A5C0"/>
